--- a/presentation/Trustfall_Project_Story.pptx
+++ b/presentation/Trustfall_Project_Story.pptx
@@ -276,19 +276,19 @@
                 <c:formatCode>General</c:formatCode>
                 <c:ptCount val="6"/>
                 <c:pt idx="0">
+                  <c:v>7</c:v>
+                </c:pt>
+                <c:pt idx="1">
                   <c:v>15</c:v>
                 </c:pt>
-                <c:pt idx="1">
-                  <c:v>11</c:v>
-                </c:pt>
                 <c:pt idx="2">
-                  <c:v>11</c:v>
+                  <c:v>16</c:v>
                 </c:pt>
                 <c:pt idx="3">
-                  <c:v>8</c:v>
+                  <c:v>12</c:v>
                 </c:pt>
                 <c:pt idx="4">
-                  <c:v>4</c:v>
+                  <c:v>7</c:v>
                 </c:pt>
                 <c:pt idx="5">
                   <c:v>1</c:v>
@@ -538,10 +538,10 @@
                 <c:formatCode>General</c:formatCode>
                 <c:ptCount val="3"/>
                 <c:pt idx="0">
-                  <c:v>75</c:v>
+                  <c:v>88.88888888888889</c:v>
                 </c:pt>
                 <c:pt idx="1">
-                  <c:v>0</c:v>
+                  <c:v>33.33333333333333</c:v>
                 </c:pt>
                 <c:pt idx="2">
                   <c:v>0</c:v>
@@ -624,10 +624,10 @@
                   <c:v>100</c:v>
                 </c:pt>
                 <c:pt idx="1">
-                  <c:v>25</c:v>
+                  <c:v>33.33333333333333</c:v>
                 </c:pt>
                 <c:pt idx="2">
-                  <c:v>25</c:v>
+                  <c:v>11.11111111111111</c:v>
                 </c:pt>
               </c:numCache>
             </c:numRef>
@@ -3442,7 +3442,7 @@
                   <a:srgbClr val="64748B"/>
                 </a:solidFill>
               </a:rPr>
-              <a:t>10  |  Live metric refresh: 2026-06-21 07:30 UTC</a:t>
+              <a:t>10  |  Live metric refresh: 2026-06-21 08:37 UTC</a:t>
             </a:r>
             <a:endParaRPr lang="en-US" sz="750" dirty="0"/>
           </a:p>
@@ -4049,7 +4049,7 @@
                   <a:srgbClr val="94A3B8"/>
                 </a:solidFill>
               </a:rPr>
-              <a:t>11  |  Live metric refresh: 2026-06-21 07:30 UTC</a:t>
+              <a:t>11  |  Live metric refresh: 2026-06-21 08:37 UTC</a:t>
             </a:r>
             <a:endParaRPr lang="en-US" sz="750" dirty="0"/>
           </a:p>
@@ -4357,7 +4357,7 @@
                   <a:srgbClr val="64748B"/>
                 </a:solidFill>
               </a:rPr>
-              <a:t>12  |  Live metric refresh: 2026-06-21 07:30 UTC</a:t>
+              <a:t>12  |  Live metric refresh: 2026-06-21 08:37 UTC</a:t>
             </a:r>
             <a:endParaRPr lang="en-US" sz="750" dirty="0"/>
           </a:p>
@@ -4990,7 +4990,7 @@
                   <a:srgbClr val="94A3B8"/>
                 </a:solidFill>
               </a:rPr>
-              <a:t>2  |  Live metric refresh: 2026-06-21 07:30 UTC</a:t>
+              <a:t>2  |  Live metric refresh: 2026-06-21 08:37 UTC</a:t>
             </a:r>
             <a:endParaRPr lang="en-US" sz="750" dirty="0"/>
           </a:p>
@@ -5842,7 +5842,7 @@
                   <a:srgbClr val="64748B"/>
                 </a:solidFill>
               </a:rPr>
-              <a:t>3  |  Live metric refresh: 2026-06-21 07:30 UTC</a:t>
+              <a:t>3  |  Live metric refresh: 2026-06-21 08:37 UTC</a:t>
             </a:r>
             <a:endParaRPr lang="en-US" sz="750" dirty="0"/>
           </a:p>
@@ -6471,7 +6471,7 @@
                   <a:srgbClr val="94A3B8"/>
                 </a:solidFill>
               </a:rPr>
-              <a:t>4  |  Live metric refresh: 2026-06-21 07:30 UTC</a:t>
+              <a:t>4  |  Live metric refresh: 2026-06-21 08:37 UTC</a:t>
             </a:r>
             <a:endParaRPr lang="en-US" sz="750" dirty="0"/>
           </a:p>
@@ -6701,7 +6701,7 @@
                   <a:srgbClr val="22D3EE"/>
                 </a:solidFill>
               </a:rPr>
-              <a:t>50</a:t>
+              <a:t>58</a:t>
             </a:r>
             <a:endParaRPr lang="en-US" sz="2500" dirty="0"/>
           </a:p>
@@ -6773,7 +6773,7 @@
                   <a:srgbClr val="34D399"/>
                 </a:solidFill>
               </a:rPr>
-              <a:t>15</a:t>
+              <a:t>21</a:t>
             </a:r>
             <a:endParaRPr lang="en-US" sz="2500" dirty="0"/>
           </a:p>
@@ -6845,7 +6845,7 @@
                   <a:srgbClr val="FBBF24"/>
                 </a:solidFill>
               </a:rPr>
-              <a:t>78</a:t>
+              <a:t>116</a:t>
             </a:r>
             <a:endParaRPr lang="en-US" sz="2500" dirty="0"/>
           </a:p>
@@ -6953,7 +6953,7 @@
                   <a:srgbClr val="64748B"/>
                 </a:solidFill>
               </a:rPr>
-              <a:t>5  |  Live metric refresh: 2026-06-21 07:30 UTC</a:t>
+              <a:t>5  |  Live metric refresh: 2026-06-21 08:37 UTC</a:t>
             </a:r>
             <a:endParaRPr lang="en-US" sz="750" dirty="0"/>
           </a:p>
@@ -7200,7 +7200,7 @@
                   <a:srgbClr val="2563EB"/>
                 </a:solidFill>
               </a:rPr>
-              <a:t>20</a:t>
+              <a:t>51</a:t>
             </a:r>
             <a:endParaRPr lang="en-US" sz="2500" dirty="0"/>
           </a:p>
@@ -7236,7 +7236,7 @@
                   <a:srgbClr val="334155"/>
                 </a:solidFill>
               </a:rPr>
-              <a:t>consensus-eligible in current snapshot</a:t>
+              <a:t>final-target messages in frozen snapshot</a:t>
             </a:r>
             <a:endParaRPr lang="en-US" sz="950" dirty="0"/>
           </a:p>
@@ -7272,7 +7272,7 @@
                   <a:srgbClr val="8B5CF6"/>
                 </a:solidFill>
               </a:rPr>
-              <a:t>16</a:t>
+              <a:t>35</a:t>
             </a:r>
             <a:endParaRPr lang="en-US" sz="2500" dirty="0"/>
           </a:p>
@@ -7344,7 +7344,7 @@
                   <a:srgbClr val="34D399"/>
                 </a:solidFill>
               </a:rPr>
-              <a:t>4</a:t>
+              <a:t>9</a:t>
             </a:r>
             <a:endParaRPr lang="en-US" sz="2500" dirty="0"/>
           </a:p>
@@ -7380,7 +7380,7 @@
                   <a:srgbClr val="334155"/>
                 </a:solidFill>
               </a:rPr>
-              <a:t>frozen holdout</a:t>
+              <a:t>frozen test holdout</a:t>
             </a:r>
             <a:endParaRPr lang="en-US" sz="950" dirty="0"/>
           </a:p>
@@ -7395,7 +7395,7 @@
         <p:spPr>
           <a:xfrm>
             <a:off x="7178040" y="4736592"/>
-            <a:ext cx="3611880" cy="411480"/>
+            <a:ext cx="3611880" cy="548640"/>
           </a:xfrm>
           <a:prstGeom prst="rect">
             <a:avLst/>
@@ -7416,7 +7416,7 @@
                   <a:srgbClr val="334155"/>
                 </a:solidFill>
               </a:rPr>
-              <a:t>Quality exclusions stay visible: unreadable records, insufficient labels, and low agreement are not silently treated as truth.</a:t>
+              <a:t>Provenance: 23 worker-consensus + 28 expert-adjudicated. Unreadable records, insufficient labels, and low agreement stay excluded rather than treated as truth.</a:t>
             </a:r>
             <a:endParaRPr lang="en-US" sz="950" dirty="0"/>
           </a:p>
@@ -7452,7 +7452,7 @@
                   <a:srgbClr val="94A3B8"/>
                 </a:solidFill>
               </a:rPr>
-              <a:t>6  |  Live metric refresh: 2026-06-21 07:30 UTC</a:t>
+              <a:t>6  |  Live metric refresh: 2026-06-21 08:37 UTC</a:t>
             </a:r>
             <a:endParaRPr lang="en-US" sz="750" dirty="0"/>
           </a:p>
@@ -7682,7 +7682,7 @@
                   <a:srgbClr val="22D3EE"/>
                 </a:solidFill>
               </a:rPr>
-              <a:t>75%</a:t>
+              <a:t>89%</a:t>
             </a:r>
             <a:endParaRPr lang="en-US" sz="2500" dirty="0"/>
           </a:p>
@@ -7754,7 +7754,7 @@
                   <a:srgbClr val="FBBF24"/>
                 </a:solidFill>
               </a:rPr>
-              <a:t>0%</a:t>
+              <a:t>33%</a:t>
             </a:r>
             <a:endParaRPr lang="en-US" sz="2500" dirty="0"/>
           </a:p>
@@ -7934,7 +7934,7 @@
                   <a:srgbClr val="64748B"/>
                 </a:solidFill>
               </a:rPr>
-              <a:t>7  |  Live metric refresh: 2026-06-21 07:30 UTC</a:t>
+              <a:t>7  |  Live metric refresh: 2026-06-21 08:37 UTC</a:t>
             </a:r>
             <a:endParaRPr lang="en-US" sz="750" dirty="0"/>
           </a:p>
@@ -8229,7 +8229,7 @@
                   <a:srgbClr val="334155"/>
                 </a:solidFill>
               </a:rPr>
-              <a:t>Valid JSON rose to 100% on the frozen holdout.</a:t>
+              <a:t>Valid JSON rose to 100% on the frozen test split.</a:t>
             </a:r>
             <a:endParaRPr lang="en-US" sz="1100" dirty="0"/>
           </a:p>
@@ -8277,7 +8277,7 @@
                   <a:srgbClr val="334155"/>
                 </a:solidFill>
               </a:rPr>
-              <a:t>Exact accuracy is directional only: the holdout has just 4 examples.</a:t>
+              <a:t>Risk within-one-level: 78%. Directional only: the test split has 9 examples.</a:t>
             </a:r>
             <a:endParaRPr lang="en-US" sz="1100" dirty="0"/>
           </a:p>
@@ -8361,7 +8361,7 @@
                   <a:srgbClr val="94A3B8"/>
                 </a:solidFill>
               </a:rPr>
-              <a:t>8  |  Live metric refresh: 2026-06-21 07:30 UTC</a:t>
+              <a:t>8  |  Live metric refresh: 2026-06-21 08:37 UTC</a:t>
             </a:r>
             <a:endParaRPr lang="en-US" sz="750" dirty="0"/>
           </a:p>
@@ -9018,7 +9018,7 @@
                   <a:srgbClr val="94A3B8"/>
                 </a:solidFill>
               </a:rPr>
-              <a:t>9  |  Live metric refresh: 2026-06-21 07:30 UTC</a:t>
+              <a:t>9  |  Live metric refresh: 2026-06-21 08:37 UTC</a:t>
             </a:r>
             <a:endParaRPr lang="en-US" sz="750" dirty="0"/>
           </a:p>
